--- a/Day 4 - GPT from scratch/gpt from scratch.pptx
+++ b/Day 4 - GPT from scratch/gpt from scratch.pptx
@@ -273,7 +273,7 @@
           <a:p>
             <a:fld id="{869B6397-AC20-2A4F-A13D-DC07559D9AFB}" type="datetimeFigureOut">
               <a:rPr lang="en-LK" smtClean="0"/>
-              <a:t>2026-04-29</a:t>
+              <a:t>2026-05-01</a:t>
             </a:fld>
             <a:endParaRPr lang="en-LK"/>
           </a:p>
@@ -473,7 +473,7 @@
           <a:p>
             <a:fld id="{869B6397-AC20-2A4F-A13D-DC07559D9AFB}" type="datetimeFigureOut">
               <a:rPr lang="en-LK" smtClean="0"/>
-              <a:t>2026-04-29</a:t>
+              <a:t>2026-05-01</a:t>
             </a:fld>
             <a:endParaRPr lang="en-LK"/>
           </a:p>
@@ -683,7 +683,7 @@
           <a:p>
             <a:fld id="{869B6397-AC20-2A4F-A13D-DC07559D9AFB}" type="datetimeFigureOut">
               <a:rPr lang="en-LK" smtClean="0"/>
-              <a:t>2026-04-29</a:t>
+              <a:t>2026-05-01</a:t>
             </a:fld>
             <a:endParaRPr lang="en-LK"/>
           </a:p>
@@ -883,7 +883,7 @@
           <a:p>
             <a:fld id="{869B6397-AC20-2A4F-A13D-DC07559D9AFB}" type="datetimeFigureOut">
               <a:rPr lang="en-LK" smtClean="0"/>
-              <a:t>2026-04-29</a:t>
+              <a:t>2026-05-01</a:t>
             </a:fld>
             <a:endParaRPr lang="en-LK"/>
           </a:p>
@@ -1159,7 +1159,7 @@
           <a:p>
             <a:fld id="{869B6397-AC20-2A4F-A13D-DC07559D9AFB}" type="datetimeFigureOut">
               <a:rPr lang="en-LK" smtClean="0"/>
-              <a:t>2026-04-29</a:t>
+              <a:t>2026-05-01</a:t>
             </a:fld>
             <a:endParaRPr lang="en-LK"/>
           </a:p>
@@ -1427,7 +1427,7 @@
           <a:p>
             <a:fld id="{869B6397-AC20-2A4F-A13D-DC07559D9AFB}" type="datetimeFigureOut">
               <a:rPr lang="en-LK" smtClean="0"/>
-              <a:t>2026-04-29</a:t>
+              <a:t>2026-05-01</a:t>
             </a:fld>
             <a:endParaRPr lang="en-LK"/>
           </a:p>
@@ -1842,7 +1842,7 @@
           <a:p>
             <a:fld id="{869B6397-AC20-2A4F-A13D-DC07559D9AFB}" type="datetimeFigureOut">
               <a:rPr lang="en-LK" smtClean="0"/>
-              <a:t>2026-04-29</a:t>
+              <a:t>2026-05-01</a:t>
             </a:fld>
             <a:endParaRPr lang="en-LK"/>
           </a:p>
@@ -1984,7 +1984,7 @@
           <a:p>
             <a:fld id="{869B6397-AC20-2A4F-A13D-DC07559D9AFB}" type="datetimeFigureOut">
               <a:rPr lang="en-LK" smtClean="0"/>
-              <a:t>2026-04-29</a:t>
+              <a:t>2026-05-01</a:t>
             </a:fld>
             <a:endParaRPr lang="en-LK"/>
           </a:p>
@@ -2097,7 +2097,7 @@
           <a:p>
             <a:fld id="{869B6397-AC20-2A4F-A13D-DC07559D9AFB}" type="datetimeFigureOut">
               <a:rPr lang="en-LK" smtClean="0"/>
-              <a:t>2026-04-29</a:t>
+              <a:t>2026-05-01</a:t>
             </a:fld>
             <a:endParaRPr lang="en-LK"/>
           </a:p>
@@ -2410,7 +2410,7 @@
           <a:p>
             <a:fld id="{869B6397-AC20-2A4F-A13D-DC07559D9AFB}" type="datetimeFigureOut">
               <a:rPr lang="en-LK" smtClean="0"/>
-              <a:t>2026-04-29</a:t>
+              <a:t>2026-05-01</a:t>
             </a:fld>
             <a:endParaRPr lang="en-LK"/>
           </a:p>
@@ -2699,7 +2699,7 @@
           <a:p>
             <a:fld id="{869B6397-AC20-2A4F-A13D-DC07559D9AFB}" type="datetimeFigureOut">
               <a:rPr lang="en-LK" smtClean="0"/>
-              <a:t>2026-04-29</a:t>
+              <a:t>2026-05-01</a:t>
             </a:fld>
             <a:endParaRPr lang="en-LK"/>
           </a:p>
@@ -2942,7 +2942,7 @@
           <a:p>
             <a:fld id="{869B6397-AC20-2A4F-A13D-DC07559D9AFB}" type="datetimeFigureOut">
               <a:rPr lang="en-LK" smtClean="0"/>
-              <a:t>2026-04-29</a:t>
+              <a:t>2026-05-01</a:t>
             </a:fld>
             <a:endParaRPr lang="en-LK"/>
           </a:p>
@@ -7000,10 +7000,10 @@
       </p:sp>
       <p:sp>
         <p:nvSpPr>
-          <p:cNvPr id="11" name="TextBox 10">
-            <a:extLst>
-              <a:ext uri="{FF2B5EF4-FFF2-40B4-BE49-F238E27FC236}">
-                <a16:creationId xmlns:a16="http://schemas.microsoft.com/office/drawing/2014/main" id="{D8B52AFE-E069-906C-9F11-DF9D1100EE82}"/>
+          <p:cNvPr id="3" name="TextBox 2">
+            <a:extLst>
+              <a:ext uri="{FF2B5EF4-FFF2-40B4-BE49-F238E27FC236}">
+                <a16:creationId xmlns:a16="http://schemas.microsoft.com/office/drawing/2014/main" id="{5E005636-11AF-7523-4450-0745745854B5}"/>
               </a:ext>
             </a:extLst>
           </p:cNvPr>
@@ -7012,8 +7012,8 @@
         </p:nvSpPr>
         <p:spPr>
           <a:xfrm>
-            <a:off x="3919653" y="580535"/>
-            <a:ext cx="11651165" cy="5632311"/>
+            <a:off x="3852748" y="211203"/>
+            <a:ext cx="9684834" cy="6709529"/>
           </a:xfrm>
           <a:prstGeom prst="rect">
             <a:avLst/>
@@ -7034,7 +7034,7 @@
           <a:p>
             <a:r>
               <a:rPr lang="en-LK" sz="1000" dirty="0"/>
-              <a:t>    def __init__(self, cfg: GPTConfig):</a:t>
+              <a:t>    def __init__(self, cfg):</a:t>
             </a:r>
           </a:p>
           <a:p>
@@ -7058,19 +7058,31 @@
           <a:p>
             <a:r>
               <a:rPr lang="en-LK" sz="1000" dirty="0"/>
-              <a:t>        self.d_model = cfg.d_model</a:t>
-            </a:r>
-          </a:p>
-          <a:p>
-            <a:r>
-              <a:rPr lang="en-LK" sz="1000" dirty="0"/>
-              <a:t>        self.d_k = cfg.d_model // cfg.n_heads</a:t>
-            </a:r>
-          </a:p>
-          <a:p>
-            <a:r>
-              <a:rPr lang="en-LK" sz="1000" dirty="0"/>
-              <a:t>        self.qkv_proj = nn.Linear(cfg.d_model, 3 * cfg.d_model, bias=False)</a:t>
+              <a:t>        self.head_dim = cfg.d_model // cfg.n_heads</a:t>
+            </a:r>
+          </a:p>
+          <a:p>
+            <a:r>
+              <a:rPr lang="en-LK" sz="1000" dirty="0"/>
+              <a:t>        self.seq_len = cfg.seq_len</a:t>
+            </a:r>
+          </a:p>
+          <a:p>
+            <a:r>
+              <a:rPr lang="en-LK" sz="1000" dirty="0"/>
+              <a:t>        self.W_q = nn.Linear(cfg.d_model, cfg.d_model, bias=False)</a:t>
+            </a:r>
+          </a:p>
+          <a:p>
+            <a:r>
+              <a:rPr lang="en-LK" sz="1000" dirty="0"/>
+              <a:t>        self.W_k = nn.Linear(cfg.d_model, cfg.d_model, bias=False)</a:t>
+            </a:r>
+          </a:p>
+          <a:p>
+            <a:r>
+              <a:rPr lang="en-LK" sz="1000" dirty="0"/>
+              <a:t>        self.W_v = nn.Linear(cfg.d_model, cfg.d_model, bias=False)</a:t>
             </a:r>
           </a:p>
           <a:p>
@@ -7094,7 +7106,25 @@
           <a:p>
             <a:r>
               <a:rPr lang="en-LK" sz="1000" dirty="0"/>
-              <a:t>        self.register_buffer("mask", torch.triu(torch.ones(cfg.seq_len, cfg.seq_len), diagonal=1).bool())</a:t>
+              <a:t>        self.register_buffer(</a:t>
+            </a:r>
+          </a:p>
+          <a:p>
+            <a:r>
+              <a:rPr lang="en-LK" sz="1000" dirty="0"/>
+              <a:t>            "mask",</a:t>
+            </a:r>
+          </a:p>
+          <a:p>
+            <a:r>
+              <a:rPr lang="en-LK" sz="1000" dirty="0"/>
+              <a:t>            torch.triu(torch.ones(cfg.seq_len, cfg.seq_len), diagonal=1).bool()</a:t>
+            </a:r>
+          </a:p>
+          <a:p>
+            <a:r>
+              <a:rPr lang="en-LK" sz="1000" dirty="0"/>
+              <a:t>        )</a:t>
             </a:r>
           </a:p>
           <a:p>
@@ -7115,13 +7145,67 @@
           <a:p>
             <a:r>
               <a:rPr lang="en-LK" sz="1000" dirty="0"/>
-              <a:t>        qkv = self.qkv_proj(x)</a:t>
-            </a:r>
-          </a:p>
-          <a:p>
-            <a:r>
-              <a:rPr lang="en-LK" sz="1000" dirty="0"/>
-              <a:t>        Q, K, V = qkv.split(self.d_model, dim=-1)</a:t>
+              <a:t>        Q = self.W_q(x)</a:t>
+            </a:r>
+          </a:p>
+          <a:p>
+            <a:r>
+              <a:rPr lang="en-LK" sz="1000" dirty="0"/>
+              <a:t>        K = self.W_k(x)</a:t>
+            </a:r>
+          </a:p>
+          <a:p>
+            <a:r>
+              <a:rPr lang="en-LK" sz="1000" dirty="0"/>
+              <a:t>        V = self.W_v(x)</a:t>
+            </a:r>
+          </a:p>
+          <a:p>
+            <a:r>
+              <a:rPr lang="en-LK" sz="1000" dirty="0"/>
+              <a:t>        Q = Q.view(B, T, self.n_heads, self.head_dim).transpose(1, 2)</a:t>
+            </a:r>
+          </a:p>
+          <a:p>
+            <a:r>
+              <a:rPr lang="en-LK" sz="1000" dirty="0"/>
+              <a:t>        K = K.view(B, T, self.n_heads, self.head_dim).transpose(1, 2)</a:t>
+            </a:r>
+          </a:p>
+          <a:p>
+            <a:r>
+              <a:rPr lang="en-LK" sz="1000" dirty="0"/>
+              <a:t>        V = V.view(B, T, self.n_heads, self.head_dim).transpose(1, 2)</a:t>
+            </a:r>
+          </a:p>
+          <a:p>
+            <a:r>
+              <a:rPr lang="en-LK" sz="1000" dirty="0"/>
+              <a:t>        scores = (Q @ K.transpose(-2, -1)) / math.sqrt(self.head_dim)</a:t>
+            </a:r>
+          </a:p>
+          <a:p>
+            <a:r>
+              <a:rPr lang="en-LK" sz="1000" dirty="0"/>
+              <a:t>        scores = scores.masked_fill(</a:t>
+            </a:r>
+          </a:p>
+          <a:p>
+            <a:r>
+              <a:rPr lang="en-LK" sz="1000" dirty="0"/>
+              <a:t>            self.mask[:T, :T],</a:t>
+            </a:r>
+          </a:p>
+          <a:p>
+            <a:r>
+              <a:rPr lang="en-LK" sz="1000" dirty="0"/>
+              <a:t>            torch.finfo(scores.dtype).min</a:t>
+            </a:r>
+          </a:p>
+          <a:p>
+            <a:r>
+              <a:rPr lang="en-LK" sz="1000" dirty="0"/>
+              <a:t>        )</a:t>
             </a:r>
           </a:p>
           <a:p>
@@ -7130,13 +7214,13 @@
           <a:p>
             <a:r>
               <a:rPr lang="en-LK" sz="1000" dirty="0"/>
-              <a:t>        def reshape(t):</a:t>
-            </a:r>
-          </a:p>
-          <a:p>
-            <a:r>
-              <a:rPr lang="en-LK" sz="1000" dirty="0"/>
-              <a:t>            return t.view(B, T, self.n_heads, self.d_k).transpose(1, 2)</a:t>
+              <a:t>        weights = F.softmax(scores, dim=-1)</a:t>
+            </a:r>
+          </a:p>
+          <a:p>
+            <a:r>
+              <a:rPr lang="en-LK" sz="1000" dirty="0"/>
+              <a:t>        weights = self.attn_dropout(weights)</a:t>
             </a:r>
           </a:p>
           <a:p>
@@ -7145,19 +7229,13 @@
           <a:p>
             <a:r>
               <a:rPr lang="en-LK" sz="1000" dirty="0"/>
-              <a:t>        Q = reshape(Q)</a:t>
-            </a:r>
-          </a:p>
-          <a:p>
-            <a:r>
-              <a:rPr lang="en-LK" sz="1000" dirty="0"/>
-              <a:t>        K = reshape(K)</a:t>
-            </a:r>
-          </a:p>
-          <a:p>
-            <a:r>
-              <a:rPr lang="en-LK" sz="1000" dirty="0"/>
-              <a:t>        V = reshape(V)</a:t>
+              <a:t>        out = weights @ V</a:t>
+            </a:r>
+          </a:p>
+          <a:p>
+            <a:r>
+              <a:rPr lang="en-LK" sz="1000" dirty="0"/>
+              <a:t>        out = out.transpose(1, 2).contiguous().view(B, T, C)</a:t>
             </a:r>
           </a:p>
           <a:p>
@@ -7166,56 +7244,17 @@
           <a:p>
             <a:r>
               <a:rPr lang="en-LK" sz="1000" dirty="0"/>
-              <a:t>        scale = math.sqrt(self.d_k)</a:t>
-            </a:r>
-          </a:p>
-          <a:p>
-            <a:r>
-              <a:rPr lang="en-LK" sz="1000" dirty="0"/>
-              <a:t>        scores = Q @ K.transpose(-2, -1) / scale</a:t>
-            </a:r>
-          </a:p>
-          <a:p>
-            <a:r>
-              <a:rPr lang="en-LK" sz="1000" dirty="0"/>
-              <a:t>        scores = scores.masked_fill(self.mask[:T, :T], float('-inf'))</a:t>
+              <a:t>        out = self.out_proj(out)</a:t>
+            </a:r>
+          </a:p>
+          <a:p>
+            <a:r>
+              <a:rPr lang="en-LK" sz="1000" dirty="0"/>
+              <a:t>        out = self.out_dropout(out)</a:t>
             </a:r>
           </a:p>
           <a:p>
             <a:endParaRPr lang="en-LK" sz="1000" dirty="0"/>
-          </a:p>
-          <a:p>
-            <a:r>
-              <a:rPr lang="en-LK" sz="1000" dirty="0"/>
-              <a:t>        weights = F.softmax(scores, dim=-1)</a:t>
-            </a:r>
-          </a:p>
-          <a:p>
-            <a:r>
-              <a:rPr lang="en-LK" sz="1000" dirty="0"/>
-              <a:t>        weights = self.attn_dropout(weights)</a:t>
-            </a:r>
-          </a:p>
-          <a:p>
-            <a:endParaRPr lang="en-LK" sz="1000" dirty="0"/>
-          </a:p>
-          <a:p>
-            <a:r>
-              <a:rPr lang="en-LK" sz="1000" dirty="0"/>
-              <a:t>        out = weights @ V</a:t>
-            </a:r>
-          </a:p>
-          <a:p>
-            <a:r>
-              <a:rPr lang="en-LK" sz="1000" dirty="0"/>
-              <a:t>        out = out.transpose(1, 2).contiguous().view(B, T, C)</a:t>
-            </a:r>
-          </a:p>
-          <a:p>
-            <a:r>
-              <a:rPr lang="en-LK" sz="1000" dirty="0"/>
-              <a:t>        out = self.out_dropout(self.out_proj(out))</a:t>
-            </a:r>
           </a:p>
           <a:p>
             <a:r>

--- a/Day 4 - GPT from scratch/gpt from scratch.pptx
+++ b/Day 4 - GPT from scratch/gpt from scratch.pptx
@@ -7013,7 +7013,7 @@
         <p:spPr>
           <a:xfrm>
             <a:off x="3852748" y="211203"/>
-            <a:ext cx="9684834" cy="6709529"/>
+            <a:ext cx="9684834" cy="6571030"/>
           </a:xfrm>
           <a:prstGeom prst="rect">
             <a:avLst/>
@@ -7234,8 +7234,8 @@
           </a:p>
           <a:p>
             <a:r>
-              <a:rPr lang="en-LK" sz="1000" dirty="0"/>
-              <a:t>        out = out.transpose(1, 2).contiguous().view(B, T, C)</a:t>
+              <a:rPr lang="en-LK" sz="1000"/>
+              <a:t>        out = out.transpose(1, 2).reshape(B, T, C)</a:t>
             </a:r>
           </a:p>
           <a:p>

--- a/Day 4 - GPT from scratch/gpt from scratch.pptx
+++ b/Day 4 - GPT from scratch/gpt from scratch.pptx
@@ -7234,7 +7234,7 @@
           </a:p>
           <a:p>
             <a:r>
-              <a:rPr lang="en-LK" sz="1000"/>
+              <a:rPr lang="en-LK" sz="1000" dirty="0"/>
               <a:t>        out = out.transpose(1, 2).reshape(B, T, C)</a:t>
             </a:r>
           </a:p>
